--- a/probability_and_statistics/3_probability/probability-2-Rules-3-multiplication.pptx
+++ b/probability_and_statistics/3_probability/probability-2-Rules-3-multiplication.pptx
@@ -233,7 +233,7 @@
           <a:p>
             <a:fld id="{7BAEECA8-D063-486F-AE31-5020270C1449}" type="datetimeFigureOut">
               <a:rPr lang="en-US" smtClean="0"/>
-              <a:t>11/1/2025</a:t>
+              <a:t>4/29/2026</a:t>
             </a:fld>
             <a:endParaRPr lang="en-US"/>
           </a:p>
@@ -410,7 +410,7 @@
           <a:p>
             <a:fld id="{22B04693-6424-47C2-B763-AEA4CC3DEB22}" type="datetimeFigureOut">
               <a:rPr lang="en-US" smtClean="0"/>
-              <a:t>11/1/2025</a:t>
+              <a:t>4/29/2026</a:t>
             </a:fld>
             <a:endParaRPr lang="en-US"/>
           </a:p>
@@ -1232,7 +1232,7 @@
           <a:p>
             <a:fld id="{6383FAE1-13DE-4511-8C1B-C8AFB720664C}" type="datetimeFigureOut">
               <a:rPr lang="en-US" smtClean="0"/>
-              <a:t>11/1/2025</a:t>
+              <a:t>4/29/2026</a:t>
             </a:fld>
             <a:endParaRPr lang="en-US"/>
           </a:p>
@@ -1430,7 +1430,7 @@
           <a:p>
             <a:fld id="{6383FAE1-13DE-4511-8C1B-C8AFB720664C}" type="datetimeFigureOut">
               <a:rPr lang="en-US" smtClean="0"/>
-              <a:t>11/1/2025</a:t>
+              <a:t>4/29/2026</a:t>
             </a:fld>
             <a:endParaRPr lang="en-US"/>
           </a:p>
@@ -1638,7 +1638,7 @@
           <a:p>
             <a:fld id="{6383FAE1-13DE-4511-8C1B-C8AFB720664C}" type="datetimeFigureOut">
               <a:rPr lang="en-US" smtClean="0"/>
-              <a:t>11/1/2025</a:t>
+              <a:t>4/29/2026</a:t>
             </a:fld>
             <a:endParaRPr lang="en-US"/>
           </a:p>
@@ -1836,7 +1836,7 @@
           <a:p>
             <a:fld id="{6383FAE1-13DE-4511-8C1B-C8AFB720664C}" type="datetimeFigureOut">
               <a:rPr lang="en-US" smtClean="0"/>
-              <a:t>11/1/2025</a:t>
+              <a:t>4/29/2026</a:t>
             </a:fld>
             <a:endParaRPr lang="en-US"/>
           </a:p>
@@ -2111,7 +2111,7 @@
           <a:p>
             <a:fld id="{6383FAE1-13DE-4511-8C1B-C8AFB720664C}" type="datetimeFigureOut">
               <a:rPr lang="en-US" smtClean="0"/>
-              <a:t>11/1/2025</a:t>
+              <a:t>4/29/2026</a:t>
             </a:fld>
             <a:endParaRPr lang="en-US"/>
           </a:p>
@@ -2376,7 +2376,7 @@
           <a:p>
             <a:fld id="{6383FAE1-13DE-4511-8C1B-C8AFB720664C}" type="datetimeFigureOut">
               <a:rPr lang="en-US" smtClean="0"/>
-              <a:t>11/1/2025</a:t>
+              <a:t>4/29/2026</a:t>
             </a:fld>
             <a:endParaRPr lang="en-US"/>
           </a:p>
@@ -2788,7 +2788,7 @@
           <a:p>
             <a:fld id="{6383FAE1-13DE-4511-8C1B-C8AFB720664C}" type="datetimeFigureOut">
               <a:rPr lang="en-US" smtClean="0"/>
-              <a:t>11/1/2025</a:t>
+              <a:t>4/29/2026</a:t>
             </a:fld>
             <a:endParaRPr lang="en-US"/>
           </a:p>
@@ -2929,7 +2929,7 @@
           <a:p>
             <a:fld id="{6383FAE1-13DE-4511-8C1B-C8AFB720664C}" type="datetimeFigureOut">
               <a:rPr lang="en-US" smtClean="0"/>
-              <a:t>11/1/2025</a:t>
+              <a:t>4/29/2026</a:t>
             </a:fld>
             <a:endParaRPr lang="en-US"/>
           </a:p>
@@ -3042,7 +3042,7 @@
           <a:p>
             <a:fld id="{6383FAE1-13DE-4511-8C1B-C8AFB720664C}" type="datetimeFigureOut">
               <a:rPr lang="en-US" smtClean="0"/>
-              <a:t>11/1/2025</a:t>
+              <a:t>4/29/2026</a:t>
             </a:fld>
             <a:endParaRPr lang="en-US"/>
           </a:p>
@@ -3353,7 +3353,7 @@
           <a:p>
             <a:fld id="{6383FAE1-13DE-4511-8C1B-C8AFB720664C}" type="datetimeFigureOut">
               <a:rPr lang="en-US" smtClean="0"/>
-              <a:t>11/1/2025</a:t>
+              <a:t>4/29/2026</a:t>
             </a:fld>
             <a:endParaRPr lang="en-US"/>
           </a:p>
@@ -3644,7 +3644,7 @@
           <a:p>
             <a:fld id="{6383FAE1-13DE-4511-8C1B-C8AFB720664C}" type="datetimeFigureOut">
               <a:rPr lang="en-US" smtClean="0"/>
-              <a:t>11/1/2025</a:t>
+              <a:t>4/29/2026</a:t>
             </a:fld>
             <a:endParaRPr lang="en-US"/>
           </a:p>
@@ -3888,7 +3888,7 @@
           <a:p>
             <a:fld id="{6383FAE1-13DE-4511-8C1B-C8AFB720664C}" type="datetimeFigureOut">
               <a:rPr lang="en-US" smtClean="0"/>
-              <a:t>11/1/2025</a:t>
+              <a:t>4/29/2026</a:t>
             </a:fld>
             <a:endParaRPr lang="en-US"/>
           </a:p>
@@ -4505,7 +4505,7 @@
         <p:spPr>
           <a:xfrm>
             <a:off x="219456" y="1157699"/>
-            <a:ext cx="10067544" cy="1754326"/>
+            <a:ext cx="10067544" cy="2308324"/>
           </a:xfrm>
           <a:prstGeom prst="rect">
             <a:avLst/>
@@ -4519,7 +4519,7 @@
           <a:lstStyle/>
           <a:p>
             <a:r>
-              <a:rPr lang="en-US" b="1" dirty="0">
+              <a:rPr lang="en-US" sz="2400" b="1" dirty="0">
                 <a:solidFill>
                   <a:schemeClr val="accent6">
                     <a:lumMod val="60000"/>
@@ -4530,7 +4530,7 @@
               <a:t>Problem</a:t>
             </a:r>
             <a:r>
-              <a:rPr lang="en-US" dirty="0">
+              <a:rPr lang="en-US" sz="2400" dirty="0">
                 <a:solidFill>
                   <a:schemeClr val="accent6">
                     <a:lumMod val="60000"/>
@@ -4543,7 +4543,7 @@
           </a:p>
           <a:p>
             <a:r>
-              <a:rPr lang="en-US" dirty="0">
+              <a:rPr lang="en-US" sz="2400" dirty="0">
                 <a:solidFill>
                   <a:schemeClr val="accent6">
                     <a:lumMod val="60000"/>
@@ -4556,7 +4556,7 @@
           </a:p>
           <a:p>
             <a:r>
-              <a:rPr lang="en-US" dirty="0">
+              <a:rPr lang="en-US" sz="2400" dirty="0">
                 <a:solidFill>
                   <a:schemeClr val="accent6">
                     <a:lumMod val="60000"/>
@@ -4567,7 +4567,7 @@
               <a:t>B: “The number is greater than 3.” </a:t>
             </a:r>
             <a:r>
-              <a:rPr lang="en-US" dirty="0">
+              <a:rPr lang="en-US" sz="2400" dirty="0">
                 <a:solidFill>
                   <a:schemeClr val="accent6">
                     <a:lumMod val="60000"/>
@@ -4580,7 +4580,7 @@
             </a:r>
           </a:p>
           <a:p>
-            <a:endParaRPr lang="en-US" dirty="0">
+            <a:endParaRPr lang="en-US" sz="2400" dirty="0">
               <a:solidFill>
                 <a:schemeClr val="accent6">
                   <a:lumMod val="60000"/>
@@ -4591,7 +4591,7 @@
           </a:p>
           <a:p>
             <a:r>
-              <a:rPr lang="en-US" dirty="0">
+              <a:rPr lang="en-US" sz="2400" dirty="0">
                 <a:solidFill>
                   <a:schemeClr val="accent6">
                     <a:lumMod val="60000"/>
@@ -4604,7 +4604,7 @@
           </a:p>
           <a:p>
             <a:r>
-              <a:rPr lang="en-US" dirty="0">
+              <a:rPr lang="en-US" sz="2400" dirty="0">
                 <a:solidFill>
                   <a:schemeClr val="accent6">
                     <a:lumMod val="60000"/>
@@ -4994,8 +4994,8 @@
           </a:p>
         </p:txBody>
       </p:sp>
-      <mc:AlternateContent xmlns:mc="http://schemas.openxmlformats.org/markup-compatibility/2006">
-        <mc:Choice xmlns:a14="http://schemas.microsoft.com/office/drawing/2010/main" Requires="a14">
+      <mc:AlternateContent xmlns:mc="http://schemas.openxmlformats.org/markup-compatibility/2006" xmlns:a14="http://schemas.microsoft.com/office/drawing/2010/main">
+        <mc:Choice Requires="a14">
           <p:sp>
             <p:nvSpPr>
               <p:cNvPr id="7" name="TextBox 6">
@@ -5886,7 +5886,7 @@
             </p:txBody>
           </p:sp>
         </mc:Choice>
-        <mc:Fallback>
+        <mc:Fallback xmlns="">
           <p:sp>
             <p:nvSpPr>
               <p:cNvPr id="7" name="TextBox 6">
@@ -6414,8 +6414,8 @@
           </a:p>
         </p:txBody>
       </p:sp>
-      <mc:AlternateContent xmlns:mc="http://schemas.openxmlformats.org/markup-compatibility/2006">
-        <mc:Choice xmlns:a14="http://schemas.microsoft.com/office/drawing/2010/main" Requires="a14">
+      <mc:AlternateContent xmlns:mc="http://schemas.openxmlformats.org/markup-compatibility/2006" xmlns:a14="http://schemas.microsoft.com/office/drawing/2010/main">
+        <mc:Choice Requires="a14">
           <p:sp>
             <p:nvSpPr>
               <p:cNvPr id="7" name="TextBox 6">
@@ -7145,7 +7145,7 @@
             </p:txBody>
           </p:sp>
         </mc:Choice>
-        <mc:Fallback>
+        <mc:Fallback xmlns="">
           <p:sp>
             <p:nvSpPr>
               <p:cNvPr id="7" name="TextBox 6">
@@ -7338,8 +7338,8 @@
           </a:p>
         </p:txBody>
       </p:sp>
-      <mc:AlternateContent xmlns:mc="http://schemas.openxmlformats.org/markup-compatibility/2006">
-        <mc:Choice xmlns:a14="http://schemas.microsoft.com/office/drawing/2010/main" Requires="a14">
+      <mc:AlternateContent xmlns:mc="http://schemas.openxmlformats.org/markup-compatibility/2006" xmlns:a14="http://schemas.microsoft.com/office/drawing/2010/main">
+        <mc:Choice Requires="a14">
           <p:sp>
             <p:nvSpPr>
               <p:cNvPr id="7" name="TextBox 6">
@@ -7899,7 +7899,7 @@
             </p:txBody>
           </p:sp>
         </mc:Choice>
-        <mc:Fallback>
+        <mc:Fallback xmlns="">
           <p:sp>
             <p:nvSpPr>
               <p:cNvPr id="7" name="TextBox 6">
@@ -8092,8 +8092,8 @@
           </a:p>
         </p:txBody>
       </p:sp>
-      <mc:AlternateContent xmlns:mc="http://schemas.openxmlformats.org/markup-compatibility/2006">
-        <mc:Choice xmlns:a14="http://schemas.microsoft.com/office/drawing/2010/main" Requires="a14">
+      <mc:AlternateContent xmlns:mc="http://schemas.openxmlformats.org/markup-compatibility/2006" xmlns:a14="http://schemas.microsoft.com/office/drawing/2010/main">
+        <mc:Choice Requires="a14">
           <p:sp>
             <p:nvSpPr>
               <p:cNvPr id="7" name="TextBox 6">
@@ -8910,7 +8910,7 @@
             </p:txBody>
           </p:sp>
         </mc:Choice>
-        <mc:Fallback>
+        <mc:Fallback xmlns="">
           <p:sp>
             <p:nvSpPr>
               <p:cNvPr id="7" name="TextBox 6">
@@ -9237,8 +9237,8 @@
           <a:chExt cx="0" cy="0"/>
         </a:xfrm>
       </p:grpSpPr>
-      <mc:AlternateContent xmlns:mc="http://schemas.openxmlformats.org/markup-compatibility/2006">
-        <mc:Choice xmlns:a14="http://schemas.microsoft.com/office/drawing/2010/main" Requires="a14">
+      <mc:AlternateContent xmlns:mc="http://schemas.openxmlformats.org/markup-compatibility/2006" xmlns:a14="http://schemas.microsoft.com/office/drawing/2010/main">
+        <mc:Choice Requires="a14">
           <p:sp>
             <p:nvSpPr>
               <p:cNvPr id="7" name="TextBox 6">
@@ -9414,7 +9414,7 @@
                     <m:sSup>
                       <m:sSupPr>
                         <m:ctrlPr>
-                          <a:rPr lang="en-US" dirty="0" smtClean="0">
+                          <a:rPr lang="en-US" i="1" dirty="0" smtClean="0">
                             <a:solidFill>
                               <a:schemeClr val="accent6">
                                 <a:lumMod val="60000"/>
@@ -10154,7 +10154,7 @@
             </p:txBody>
           </p:sp>
         </mc:Choice>
-        <mc:Fallback>
+        <mc:Fallback xmlns="">
           <p:sp>
             <p:nvSpPr>
               <p:cNvPr id="7" name="TextBox 6">
@@ -10347,8 +10347,8 @@
           <a:chExt cx="0" cy="0"/>
         </a:xfrm>
       </p:grpSpPr>
-      <mc:AlternateContent xmlns:mc="http://schemas.openxmlformats.org/markup-compatibility/2006">
-        <mc:Choice xmlns:a14="http://schemas.microsoft.com/office/drawing/2010/main" Requires="a14">
+      <mc:AlternateContent xmlns:mc="http://schemas.openxmlformats.org/markup-compatibility/2006" xmlns:a14="http://schemas.microsoft.com/office/drawing/2010/main">
+        <mc:Choice Requires="a14">
           <p:sp>
             <p:nvSpPr>
               <p:cNvPr id="7" name="TextBox 6">
@@ -10992,7 +10992,7 @@
             </p:txBody>
           </p:sp>
         </mc:Choice>
-        <mc:Fallback>
+        <mc:Fallback xmlns="">
           <p:sp>
             <p:nvSpPr>
               <p:cNvPr id="7" name="TextBox 6">
@@ -14198,856 +14198,6 @@
           </a:p>
         </p:txBody>
       </p:sp>
-      <mc:AlternateContent xmlns:mc="http://schemas.openxmlformats.org/markup-compatibility/2006">
-        <mc:Choice xmlns:a14="http://schemas.microsoft.com/office/drawing/2010/main" Requires="a14">
-          <p:sp>
-            <p:nvSpPr>
-              <p:cNvPr id="7" name="TextBox 6">
-                <a:extLst>
-                  <a:ext uri="{FF2B5EF4-FFF2-40B4-BE49-F238E27FC236}">
-                    <a16:creationId xmlns:a16="http://schemas.microsoft.com/office/drawing/2014/main" id="{8FDCC5E6-B17D-307F-BBBE-8A8A73A0E578}"/>
-                  </a:ext>
-                </a:extLst>
-              </p:cNvPr>
-              <p:cNvSpPr txBox="1"/>
-              <p:nvPr/>
-            </p:nvSpPr>
-            <p:spPr>
-              <a:xfrm>
-                <a:off x="219456" y="1157699"/>
-                <a:ext cx="11704320" cy="5355312"/>
-              </a:xfrm>
-              <a:prstGeom prst="rect">
-                <a:avLst/>
-              </a:prstGeom>
-              <a:noFill/>
-            </p:spPr>
-            <p:txBody>
-              <a:bodyPr wrap="square">
-                <a:spAutoFit/>
-              </a:bodyPr>
-              <a:lstStyle/>
-              <a:p>
-                <a:pPr marL="0" indent="0">
-                  <a:buNone/>
-                </a:pPr>
-                <a:r>
-                  <a:rPr lang="en-US" dirty="0">
-                    <a:solidFill>
-                      <a:schemeClr val="accent6">
-                        <a:lumMod val="60000"/>
-                        <a:lumOff val="40000"/>
-                      </a:schemeClr>
-                    </a:solidFill>
-                  </a:rPr>
-                  <a:t>The </a:t>
-                </a:r>
-                <a:r>
-                  <a:rPr lang="en-US" b="1" dirty="0">
-                    <a:solidFill>
-                      <a:schemeClr val="accent6">
-                        <a:lumMod val="60000"/>
-                        <a:lumOff val="40000"/>
-                      </a:schemeClr>
-                    </a:solidFill>
-                  </a:rPr>
-                  <a:t>multiplication rule</a:t>
-                </a:r>
-                <a:r>
-                  <a:rPr lang="en-US" dirty="0">
-                    <a:solidFill>
-                      <a:schemeClr val="accent6">
-                        <a:lumMod val="60000"/>
-                        <a:lumOff val="40000"/>
-                      </a:schemeClr>
-                    </a:solidFill>
-                  </a:rPr>
-                  <a:t> is used to find the probability that </a:t>
-                </a:r>
-                <a:r>
-                  <a:rPr lang="en-US" b="1" dirty="0">
-                    <a:solidFill>
-                      <a:schemeClr val="accent6">
-                        <a:lumMod val="60000"/>
-                        <a:lumOff val="40000"/>
-                      </a:schemeClr>
-                    </a:solidFill>
-                  </a:rPr>
-                  <a:t>two (or more) events happen together</a:t>
-                </a:r>
-                <a:r>
-                  <a:rPr lang="en-US" dirty="0">
-                    <a:solidFill>
-                      <a:schemeClr val="accent6">
-                        <a:lumMod val="60000"/>
-                        <a:lumOff val="40000"/>
-                      </a:schemeClr>
-                    </a:solidFill>
-                  </a:rPr>
-                  <a:t> — that is, the intersection of events.</a:t>
-                </a:r>
-              </a:p>
-              <a:p>
-                <a:pPr marL="0" indent="0">
-                  <a:buNone/>
-                </a:pPr>
-                <a:r>
-                  <a:rPr lang="en-US" dirty="0">
-                    <a:solidFill>
-                      <a:schemeClr val="accent6">
-                        <a:lumMod val="60000"/>
-                        <a:lumOff val="40000"/>
-                      </a:schemeClr>
-                    </a:solidFill>
-                  </a:rPr>
-                  <a:t>Mathematically, for </a:t>
-                </a:r>
-                <a:r>
-                  <a:rPr lang="en-US" b="1" dirty="0">
-                    <a:solidFill>
-                      <a:schemeClr val="accent6">
-                        <a:lumMod val="60000"/>
-                        <a:lumOff val="40000"/>
-                      </a:schemeClr>
-                    </a:solidFill>
-                  </a:rPr>
-                  <a:t>two events A and B</a:t>
-                </a:r>
-                <a:r>
-                  <a:rPr lang="en-US" dirty="0">
-                    <a:solidFill>
-                      <a:schemeClr val="accent6">
-                        <a:lumMod val="60000"/>
-                        <a:lumOff val="40000"/>
-                      </a:schemeClr>
-                    </a:solidFill>
-                  </a:rPr>
-                  <a:t>:</a:t>
-                </a:r>
-              </a:p>
-              <a:p>
-                <a:pPr marL="0" indent="0" algn="ctr">
-                  <a:buNone/>
-                </a:pPr>
-                <a:r>
-                  <a:rPr lang="en-US" b="1" dirty="0">
-                    <a:solidFill>
-                      <a:schemeClr val="accent6">
-                        <a:lumMod val="60000"/>
-                        <a:lumOff val="40000"/>
-                      </a:schemeClr>
-                    </a:solidFill>
-                  </a:rPr>
-                  <a:t>P(A∩B) = P(A) × P(B|A)</a:t>
-                </a:r>
-              </a:p>
-              <a:p>
-                <a:pPr marL="0" indent="0">
-                  <a:buNone/>
-                </a:pPr>
-                <a:endParaRPr lang="en-US" b="1" dirty="0">
-                  <a:solidFill>
-                    <a:schemeClr val="accent6">
-                      <a:lumMod val="60000"/>
-                      <a:lumOff val="40000"/>
-                    </a:schemeClr>
-                  </a:solidFill>
-                </a:endParaRPr>
-              </a:p>
-              <a:p>
-                <a:r>
-                  <a:rPr lang="en-US" dirty="0">
-                    <a:solidFill>
-                      <a:schemeClr val="accent6">
-                        <a:lumMod val="60000"/>
-                        <a:lumOff val="40000"/>
-                      </a:schemeClr>
-                    </a:solidFill>
-                  </a:rPr>
-                  <a:t>P(A∩B):  Probability that both A </a:t>
-                </a:r>
-                <a:r>
-                  <a:rPr lang="en-US" b="1" u="sng" dirty="0">
-                    <a:solidFill>
-                      <a:schemeClr val="accent6">
-                        <a:lumMod val="60000"/>
-                        <a:lumOff val="40000"/>
-                      </a:schemeClr>
-                    </a:solidFill>
-                  </a:rPr>
-                  <a:t>and</a:t>
-                </a:r>
-                <a:r>
-                  <a:rPr lang="en-US" dirty="0">
-                    <a:solidFill>
-                      <a:schemeClr val="accent6">
-                        <a:lumMod val="60000"/>
-                        <a:lumOff val="40000"/>
-                      </a:schemeClr>
-                    </a:solidFill>
-                  </a:rPr>
-                  <a:t> B occur.</a:t>
-                </a:r>
-              </a:p>
-              <a:p>
-                <a:pPr marL="0" indent="0">
-                  <a:buNone/>
-                </a:pPr>
-                <a:r>
-                  <a:rPr lang="en-US" dirty="0">
-                    <a:solidFill>
-                      <a:schemeClr val="accent6">
-                        <a:lumMod val="60000"/>
-                        <a:lumOff val="40000"/>
-                      </a:schemeClr>
-                    </a:solidFill>
-                  </a:rPr>
-                  <a:t>P(A)      : Probability that event A occurs.</a:t>
-                </a:r>
-              </a:p>
-              <a:p>
-                <a:pPr marL="0" indent="0">
-                  <a:buNone/>
-                </a:pPr>
-                <a:r>
-                  <a:rPr lang="en-US" dirty="0">
-                    <a:solidFill>
-                      <a:schemeClr val="accent6">
-                        <a:lumMod val="60000"/>
-                        <a:lumOff val="40000"/>
-                      </a:schemeClr>
-                    </a:solidFill>
-                  </a:rPr>
-                  <a:t>P(B|A)  : Probability that event B occurs given that A has already occurred.</a:t>
-                </a:r>
-              </a:p>
-              <a:p>
-                <a:pPr marL="0" indent="0">
-                  <a:buNone/>
-                </a:pPr>
-                <a:endParaRPr lang="en-US" dirty="0">
-                  <a:solidFill>
-                    <a:schemeClr val="accent6">
-                      <a:lumMod val="60000"/>
-                      <a:lumOff val="40000"/>
-                    </a:schemeClr>
-                  </a:solidFill>
-                </a:endParaRPr>
-              </a:p>
-              <a:p>
-                <a:pPr marL="0" indent="0">
-                  <a:buNone/>
-                </a:pPr>
-                <a:endParaRPr lang="en-US" dirty="0">
-                  <a:solidFill>
-                    <a:schemeClr val="accent6">
-                      <a:lumMod val="60000"/>
-                      <a:lumOff val="40000"/>
-                    </a:schemeClr>
-                  </a:solidFill>
-                </a:endParaRPr>
-              </a:p>
-              <a:p>
-                <a:pPr marL="0" indent="0">
-                  <a:buNone/>
-                </a:pPr>
-                <a:endParaRPr lang="en-US" dirty="0">
-                  <a:solidFill>
-                    <a:schemeClr val="accent6">
-                      <a:lumMod val="60000"/>
-                      <a:lumOff val="40000"/>
-                    </a:schemeClr>
-                  </a:solidFill>
-                </a:endParaRPr>
-              </a:p>
-              <a:p>
-                <a:pPr marL="0" indent="0">
-                  <a:buNone/>
-                </a:pPr>
-                <a:endParaRPr lang="en-US" dirty="0">
-                  <a:solidFill>
-                    <a:schemeClr val="accent6">
-                      <a:lumMod val="60000"/>
-                      <a:lumOff val="40000"/>
-                    </a:schemeClr>
-                  </a:solidFill>
-                </a:endParaRPr>
-              </a:p>
-              <a:p>
-                <a:pPr marL="0" indent="0">
-                  <a:buNone/>
-                </a:pPr>
-                <a:endParaRPr lang="en-US" dirty="0">
-                  <a:solidFill>
-                    <a:schemeClr val="accent6">
-                      <a:lumMod val="60000"/>
-                      <a:lumOff val="40000"/>
-                    </a:schemeClr>
-                  </a:solidFill>
-                </a:endParaRPr>
-              </a:p>
-              <a:p>
-                <a:pPr marL="0" indent="0">
-                  <a:buNone/>
-                </a:pPr>
-                <a:r>
-                  <a:rPr lang="en-US" dirty="0">
-                    <a:solidFill>
-                      <a:schemeClr val="accent6">
-                        <a:lumMod val="60000"/>
-                        <a:lumOff val="40000"/>
-                      </a:schemeClr>
-                    </a:solidFill>
-                  </a:rPr>
-                  <a:t>Special Case: If A and B are independent, then P(B|A) = P(B). In this case,</a:t>
-                </a:r>
-              </a:p>
-              <a:p>
-                <a:pPr/>
-                <a14:m>
-                  <m:oMathPara xmlns:m="http://schemas.openxmlformats.org/officeDocument/2006/math">
-                    <m:oMathParaPr>
-                      <m:jc m:val="centerGroup"/>
-                    </m:oMathParaPr>
-                    <m:oMath xmlns:m="http://schemas.openxmlformats.org/officeDocument/2006/math">
-                      <m:r>
-                        <a:rPr lang="en-US" i="1">
-                          <a:solidFill>
-                            <a:schemeClr val="accent6">
-                              <a:lumMod val="60000"/>
-                              <a:lumOff val="40000"/>
-                            </a:schemeClr>
-                          </a:solidFill>
-                          <a:latin typeface="Cambria Math" panose="02040503050406030204" pitchFamily="18" charset="0"/>
-                        </a:rPr>
-                        <m:t>𝑃</m:t>
-                      </m:r>
-                      <m:d>
-                        <m:dPr>
-                          <m:ctrlPr>
-                            <a:rPr lang="ar-AE" i="1">
-                              <a:solidFill>
-                                <a:schemeClr val="accent6">
-                                  <a:lumMod val="60000"/>
-                                  <a:lumOff val="40000"/>
-                                </a:schemeClr>
-                              </a:solidFill>
-                              <a:latin typeface="Cambria Math" panose="02040503050406030204" pitchFamily="18" charset="0"/>
-                            </a:rPr>
-                          </m:ctrlPr>
-                        </m:dPr>
-                        <m:e>
-                          <m:r>
-                            <a:rPr lang="ar-AE" i="1">
-                              <a:solidFill>
-                                <a:schemeClr val="accent6">
-                                  <a:lumMod val="60000"/>
-                                  <a:lumOff val="40000"/>
-                                </a:schemeClr>
-                              </a:solidFill>
-                              <a:latin typeface="Cambria Math" panose="02040503050406030204" pitchFamily="18" charset="0"/>
-                            </a:rPr>
-                            <m:t>𝐴</m:t>
-                          </m:r>
-                          <m:r>
-                            <a:rPr lang="ar-AE">
-                              <a:solidFill>
-                                <a:schemeClr val="accent6">
-                                  <a:lumMod val="60000"/>
-                                  <a:lumOff val="40000"/>
-                                </a:schemeClr>
-                              </a:solidFill>
-                              <a:latin typeface="Cambria Math" panose="02040503050406030204" pitchFamily="18" charset="0"/>
-                            </a:rPr>
-                            <m:t>∩</m:t>
-                          </m:r>
-                          <m:r>
-                            <a:rPr lang="ar-AE" i="1">
-                              <a:solidFill>
-                                <a:schemeClr val="accent6">
-                                  <a:lumMod val="60000"/>
-                                  <a:lumOff val="40000"/>
-                                </a:schemeClr>
-                              </a:solidFill>
-                              <a:latin typeface="Cambria Math" panose="02040503050406030204" pitchFamily="18" charset="0"/>
-                            </a:rPr>
-                            <m:t>𝐵</m:t>
-                          </m:r>
-                        </m:e>
-                      </m:d>
-                      <m:r>
-                        <a:rPr lang="ar-AE">
-                          <a:solidFill>
-                            <a:schemeClr val="accent6">
-                              <a:lumMod val="60000"/>
-                              <a:lumOff val="40000"/>
-                            </a:schemeClr>
-                          </a:solidFill>
-                          <a:latin typeface="Cambria Math" panose="02040503050406030204" pitchFamily="18" charset="0"/>
-                        </a:rPr>
-                        <m:t>=</m:t>
-                      </m:r>
-                      <m:r>
-                        <a:rPr lang="ar-AE" i="1">
-                          <a:solidFill>
-                            <a:schemeClr val="accent6">
-                              <a:lumMod val="60000"/>
-                              <a:lumOff val="40000"/>
-                            </a:schemeClr>
-                          </a:solidFill>
-                          <a:latin typeface="Cambria Math" panose="02040503050406030204" pitchFamily="18" charset="0"/>
-                        </a:rPr>
-                        <m:t>𝑃</m:t>
-                      </m:r>
-                      <m:d>
-                        <m:dPr>
-                          <m:ctrlPr>
-                            <a:rPr lang="ar-AE" i="1">
-                              <a:solidFill>
-                                <a:schemeClr val="accent6">
-                                  <a:lumMod val="60000"/>
-                                  <a:lumOff val="40000"/>
-                                </a:schemeClr>
-                              </a:solidFill>
-                              <a:latin typeface="Cambria Math" panose="02040503050406030204" pitchFamily="18" charset="0"/>
-                            </a:rPr>
-                          </m:ctrlPr>
-                        </m:dPr>
-                        <m:e>
-                          <m:r>
-                            <a:rPr lang="ar-AE" i="1">
-                              <a:solidFill>
-                                <a:schemeClr val="accent6">
-                                  <a:lumMod val="60000"/>
-                                  <a:lumOff val="40000"/>
-                                </a:schemeClr>
-                              </a:solidFill>
-                              <a:latin typeface="Cambria Math" panose="02040503050406030204" pitchFamily="18" charset="0"/>
-                            </a:rPr>
-                            <m:t>𝐴</m:t>
-                          </m:r>
-                        </m:e>
-                      </m:d>
-                      <m:r>
-                        <a:rPr lang="ar-AE">
-                          <a:solidFill>
-                            <a:schemeClr val="accent6">
-                              <a:lumMod val="60000"/>
-                              <a:lumOff val="40000"/>
-                            </a:schemeClr>
-                          </a:solidFill>
-                          <a:latin typeface="Cambria Math" panose="02040503050406030204" pitchFamily="18" charset="0"/>
-                        </a:rPr>
-                        <m:t>×</m:t>
-                      </m:r>
-                      <m:r>
-                        <a:rPr lang="ar-AE" i="1">
-                          <a:solidFill>
-                            <a:schemeClr val="accent6">
-                              <a:lumMod val="60000"/>
-                              <a:lumOff val="40000"/>
-                            </a:schemeClr>
-                          </a:solidFill>
-                          <a:latin typeface="Cambria Math" panose="02040503050406030204" pitchFamily="18" charset="0"/>
-                        </a:rPr>
-                        <m:t>𝑃</m:t>
-                      </m:r>
-                      <m:d>
-                        <m:dPr>
-                          <m:ctrlPr>
-                            <a:rPr lang="ar-AE" i="1">
-                              <a:solidFill>
-                                <a:schemeClr val="accent6">
-                                  <a:lumMod val="60000"/>
-                                  <a:lumOff val="40000"/>
-                                </a:schemeClr>
-                              </a:solidFill>
-                              <a:latin typeface="Cambria Math" panose="02040503050406030204" pitchFamily="18" charset="0"/>
-                            </a:rPr>
-                          </m:ctrlPr>
-                        </m:dPr>
-                        <m:e>
-                          <m:r>
-                            <a:rPr lang="ar-AE" i="1">
-                              <a:solidFill>
-                                <a:schemeClr val="accent6">
-                                  <a:lumMod val="60000"/>
-                                  <a:lumOff val="40000"/>
-                                </a:schemeClr>
-                              </a:solidFill>
-                              <a:latin typeface="Cambria Math" panose="02040503050406030204" pitchFamily="18" charset="0"/>
-                            </a:rPr>
-                            <m:t>𝐵</m:t>
-                          </m:r>
-                        </m:e>
-                      </m:d>
-                    </m:oMath>
-                  </m:oMathPara>
-                </a14:m>
-                <a:endParaRPr lang="ar-AE" dirty="0">
-                  <a:solidFill>
-                    <a:schemeClr val="accent6">
-                      <a:lumMod val="60000"/>
-                      <a:lumOff val="40000"/>
-                    </a:schemeClr>
-                  </a:solidFill>
-                </a:endParaRPr>
-              </a:p>
-              <a:p>
-                <a:endParaRPr lang="en-US" dirty="0">
-                  <a:solidFill>
-                    <a:schemeClr val="accent6">
-                      <a:lumMod val="60000"/>
-                      <a:lumOff val="40000"/>
-                    </a:schemeClr>
-                  </a:solidFill>
-                </a:endParaRPr>
-              </a:p>
-              <a:p>
-                <a:r>
-                  <a:rPr lang="en-US" dirty="0">
-                    <a:solidFill>
-                      <a:schemeClr val="accent6">
-                        <a:lumMod val="60000"/>
-                        <a:lumOff val="40000"/>
-                      </a:schemeClr>
-                    </a:solidFill>
-                  </a:rPr>
-                  <a:t>We can use above equation to define independence of two events:</a:t>
-                </a:r>
-              </a:p>
-              <a:p>
-                <a:pPr marL="285750" indent="-285750">
-                  <a:buFont typeface="Arial" panose="020B0604020202020204" pitchFamily="34" charset="0"/>
-                  <a:buChar char="•"/>
-                </a:pPr>
-                <a:r>
-                  <a:rPr lang="en-US" dirty="0">
-                    <a:solidFill>
-                      <a:schemeClr val="accent6">
-                        <a:lumMod val="60000"/>
-                        <a:lumOff val="40000"/>
-                      </a:schemeClr>
-                    </a:solidFill>
-                  </a:rPr>
-                  <a:t>Two events </a:t>
-                </a:r>
-                <a14:m>
-                  <m:oMath xmlns:m="http://schemas.openxmlformats.org/officeDocument/2006/math">
-                    <m:r>
-                      <a:rPr lang="en-US" i="1">
-                        <a:solidFill>
-                          <a:schemeClr val="accent6">
-                            <a:lumMod val="60000"/>
-                            <a:lumOff val="40000"/>
-                          </a:schemeClr>
-                        </a:solidFill>
-                        <a:latin typeface="Cambria Math" panose="02040503050406030204" pitchFamily="18" charset="0"/>
-                      </a:rPr>
-                      <m:t>𝐴</m:t>
-                    </m:r>
-                  </m:oMath>
-                </a14:m>
-                <a:r>
-                  <a:rPr lang="en-US" dirty="0">
-                    <a:solidFill>
-                      <a:schemeClr val="accent6">
-                        <a:lumMod val="60000"/>
-                        <a:lumOff val="40000"/>
-                      </a:schemeClr>
-                    </a:solidFill>
-                  </a:rPr>
-                  <a:t> and </a:t>
-                </a:r>
-                <a14:m>
-                  <m:oMath xmlns:m="http://schemas.openxmlformats.org/officeDocument/2006/math">
-                    <m:r>
-                      <a:rPr lang="en-US" i="1">
-                        <a:solidFill>
-                          <a:schemeClr val="accent6">
-                            <a:lumMod val="60000"/>
-                            <a:lumOff val="40000"/>
-                          </a:schemeClr>
-                        </a:solidFill>
-                        <a:latin typeface="Cambria Math" panose="02040503050406030204" pitchFamily="18" charset="0"/>
-                      </a:rPr>
-                      <m:t>𝐵</m:t>
-                    </m:r>
-                  </m:oMath>
-                </a14:m>
-                <a:r>
-                  <a:rPr lang="en-US" dirty="0">
-                    <a:solidFill>
-                      <a:schemeClr val="accent6">
-                        <a:lumMod val="60000"/>
-                        <a:lumOff val="40000"/>
-                      </a:schemeClr>
-                    </a:solidFill>
-                  </a:rPr>
-                  <a:t>are </a:t>
-                </a:r>
-                <a:r>
-                  <a:rPr lang="en-US" b="1" dirty="0">
-                    <a:solidFill>
-                      <a:schemeClr val="accent6">
-                        <a:lumMod val="60000"/>
-                        <a:lumOff val="40000"/>
-                      </a:schemeClr>
-                    </a:solidFill>
-                  </a:rPr>
-                  <a:t>independent</a:t>
-                </a:r>
-                <a:r>
-                  <a:rPr lang="en-US" dirty="0">
-                    <a:solidFill>
-                      <a:schemeClr val="accent6">
-                        <a:lumMod val="60000"/>
-                        <a:lumOff val="40000"/>
-                      </a:schemeClr>
-                    </a:solidFill>
-                  </a:rPr>
-                  <a:t> if and only if</a:t>
-                </a:r>
-              </a:p>
-              <a:p>
-                <a:pPr/>
-                <a14:m>
-                  <m:oMathPara xmlns:m="http://schemas.openxmlformats.org/officeDocument/2006/math">
-                    <m:oMathParaPr>
-                      <m:jc m:val="centerGroup"/>
-                    </m:oMathParaPr>
-                    <m:oMath xmlns:m="http://schemas.openxmlformats.org/officeDocument/2006/math">
-                      <m:r>
-                        <a:rPr lang="en-US" i="1">
-                          <a:solidFill>
-                            <a:schemeClr val="accent6">
-                              <a:lumMod val="60000"/>
-                              <a:lumOff val="40000"/>
-                            </a:schemeClr>
-                          </a:solidFill>
-                          <a:latin typeface="Cambria Math" panose="02040503050406030204" pitchFamily="18" charset="0"/>
-                        </a:rPr>
-                        <m:t>𝑃</m:t>
-                      </m:r>
-                      <m:d>
-                        <m:dPr>
-                          <m:ctrlPr>
-                            <a:rPr lang="ar-AE" i="1">
-                              <a:solidFill>
-                                <a:schemeClr val="accent6">
-                                  <a:lumMod val="60000"/>
-                                  <a:lumOff val="40000"/>
-                                </a:schemeClr>
-                              </a:solidFill>
-                              <a:latin typeface="Cambria Math" panose="02040503050406030204" pitchFamily="18" charset="0"/>
-                            </a:rPr>
-                          </m:ctrlPr>
-                        </m:dPr>
-                        <m:e>
-                          <m:r>
-                            <a:rPr lang="ar-AE" i="1">
-                              <a:solidFill>
-                                <a:schemeClr val="accent6">
-                                  <a:lumMod val="60000"/>
-                                  <a:lumOff val="40000"/>
-                                </a:schemeClr>
-                              </a:solidFill>
-                              <a:latin typeface="Cambria Math" panose="02040503050406030204" pitchFamily="18" charset="0"/>
-                            </a:rPr>
-                            <m:t>𝐴</m:t>
-                          </m:r>
-                          <m:r>
-                            <a:rPr lang="ar-AE">
-                              <a:solidFill>
-                                <a:schemeClr val="accent6">
-                                  <a:lumMod val="60000"/>
-                                  <a:lumOff val="40000"/>
-                                </a:schemeClr>
-                              </a:solidFill>
-                              <a:latin typeface="Cambria Math" panose="02040503050406030204" pitchFamily="18" charset="0"/>
-                            </a:rPr>
-                            <m:t>∩</m:t>
-                          </m:r>
-                          <m:r>
-                            <a:rPr lang="ar-AE" i="1">
-                              <a:solidFill>
-                                <a:schemeClr val="accent6">
-                                  <a:lumMod val="60000"/>
-                                  <a:lumOff val="40000"/>
-                                </a:schemeClr>
-                              </a:solidFill>
-                              <a:latin typeface="Cambria Math" panose="02040503050406030204" pitchFamily="18" charset="0"/>
-                            </a:rPr>
-                            <m:t>𝐵</m:t>
-                          </m:r>
-                        </m:e>
-                      </m:d>
-                      <m:r>
-                        <a:rPr lang="ar-AE">
-                          <a:solidFill>
-                            <a:schemeClr val="accent6">
-                              <a:lumMod val="60000"/>
-                              <a:lumOff val="40000"/>
-                            </a:schemeClr>
-                          </a:solidFill>
-                          <a:latin typeface="Cambria Math" panose="02040503050406030204" pitchFamily="18" charset="0"/>
-                        </a:rPr>
-                        <m:t>=</m:t>
-                      </m:r>
-                      <m:r>
-                        <a:rPr lang="ar-AE" i="1">
-                          <a:solidFill>
-                            <a:schemeClr val="accent6">
-                              <a:lumMod val="60000"/>
-                              <a:lumOff val="40000"/>
-                            </a:schemeClr>
-                          </a:solidFill>
-                          <a:latin typeface="Cambria Math" panose="02040503050406030204" pitchFamily="18" charset="0"/>
-                        </a:rPr>
-                        <m:t>𝑃</m:t>
-                      </m:r>
-                      <m:d>
-                        <m:dPr>
-                          <m:ctrlPr>
-                            <a:rPr lang="ar-AE" i="1">
-                              <a:solidFill>
-                                <a:schemeClr val="accent6">
-                                  <a:lumMod val="60000"/>
-                                  <a:lumOff val="40000"/>
-                                </a:schemeClr>
-                              </a:solidFill>
-                              <a:latin typeface="Cambria Math" panose="02040503050406030204" pitchFamily="18" charset="0"/>
-                            </a:rPr>
-                          </m:ctrlPr>
-                        </m:dPr>
-                        <m:e>
-                          <m:r>
-                            <a:rPr lang="ar-AE" i="1">
-                              <a:solidFill>
-                                <a:schemeClr val="accent6">
-                                  <a:lumMod val="60000"/>
-                                  <a:lumOff val="40000"/>
-                                </a:schemeClr>
-                              </a:solidFill>
-                              <a:latin typeface="Cambria Math" panose="02040503050406030204" pitchFamily="18" charset="0"/>
-                            </a:rPr>
-                            <m:t>𝐴</m:t>
-                          </m:r>
-                        </m:e>
-                      </m:d>
-                      <m:r>
-                        <a:rPr lang="ar-AE">
-                          <a:solidFill>
-                            <a:schemeClr val="accent6">
-                              <a:lumMod val="60000"/>
-                              <a:lumOff val="40000"/>
-                            </a:schemeClr>
-                          </a:solidFill>
-                          <a:latin typeface="Cambria Math" panose="02040503050406030204" pitchFamily="18" charset="0"/>
-                        </a:rPr>
-                        <m:t>×</m:t>
-                      </m:r>
-                      <m:r>
-                        <a:rPr lang="ar-AE" i="1">
-                          <a:solidFill>
-                            <a:schemeClr val="accent6">
-                              <a:lumMod val="60000"/>
-                              <a:lumOff val="40000"/>
-                            </a:schemeClr>
-                          </a:solidFill>
-                          <a:latin typeface="Cambria Math" panose="02040503050406030204" pitchFamily="18" charset="0"/>
-                        </a:rPr>
-                        <m:t>𝑃</m:t>
-                      </m:r>
-                      <m:d>
-                        <m:dPr>
-                          <m:ctrlPr>
-                            <a:rPr lang="ar-AE" i="1">
-                              <a:solidFill>
-                                <a:schemeClr val="accent6">
-                                  <a:lumMod val="60000"/>
-                                  <a:lumOff val="40000"/>
-                                </a:schemeClr>
-                              </a:solidFill>
-                              <a:latin typeface="Cambria Math" panose="02040503050406030204" pitchFamily="18" charset="0"/>
-                            </a:rPr>
-                          </m:ctrlPr>
-                        </m:dPr>
-                        <m:e>
-                          <m:r>
-                            <a:rPr lang="ar-AE" i="1">
-                              <a:solidFill>
-                                <a:schemeClr val="accent6">
-                                  <a:lumMod val="60000"/>
-                                  <a:lumOff val="40000"/>
-                                </a:schemeClr>
-                              </a:solidFill>
-                              <a:latin typeface="Cambria Math" panose="02040503050406030204" pitchFamily="18" charset="0"/>
-                            </a:rPr>
-                            <m:t>𝐵</m:t>
-                          </m:r>
-                        </m:e>
-                      </m:d>
-                    </m:oMath>
-                  </m:oMathPara>
-                </a14:m>
-                <a:endParaRPr lang="ar-AE" dirty="0">
-                  <a:solidFill>
-                    <a:schemeClr val="accent6">
-                      <a:lumMod val="60000"/>
-                      <a:lumOff val="40000"/>
-                    </a:schemeClr>
-                  </a:solidFill>
-                </a:endParaRPr>
-              </a:p>
-            </p:txBody>
-          </p:sp>
-        </mc:Choice>
-        <mc:Fallback>
-          <p:sp>
-            <p:nvSpPr>
-              <p:cNvPr id="7" name="TextBox 6">
-                <a:extLst>
-                  <a:ext uri="{FF2B5EF4-FFF2-40B4-BE49-F238E27FC236}">
-                    <a16:creationId xmlns:a16="http://schemas.microsoft.com/office/drawing/2014/main" id="{8FDCC5E6-B17D-307F-BBBE-8A8A73A0E578}"/>
-                  </a:ext>
-                </a:extLst>
-              </p:cNvPr>
-              <p:cNvSpPr txBox="1">
-                <a:spLocks noRot="1" noChangeAspect="1" noMove="1" noResize="1" noEditPoints="1" noAdjustHandles="1" noChangeArrowheads="1" noChangeShapeType="1" noTextEdit="1"/>
-              </p:cNvSpPr>
-              <p:nvPr/>
-            </p:nvSpPr>
-            <p:spPr>
-              <a:xfrm>
-                <a:off x="219456" y="1157699"/>
-                <a:ext cx="11704320" cy="5355312"/>
-              </a:xfrm>
-              <a:prstGeom prst="rect">
-                <a:avLst/>
-              </a:prstGeom>
-              <a:blipFill>
-                <a:blip r:embed="rId2"/>
-                <a:stretch>
-                  <a:fillRect l="-417" t="-683" r="-625"/>
-                </a:stretch>
-              </a:blipFill>
-            </p:spPr>
-            <p:txBody>
-              <a:bodyPr/>
-              <a:lstStyle/>
-              <a:p>
-                <a:r>
-                  <a:rPr lang="en-US">
-                    <a:noFill/>
-                  </a:rPr>
-                  <a:t> </a:t>
-                </a:r>
-              </a:p>
-            </p:txBody>
-          </p:sp>
-        </mc:Fallback>
-      </mc:AlternateContent>
       <p:pic>
         <p:nvPicPr>
           <p:cNvPr id="8" name="Picture 7">
@@ -15063,7 +14213,7 @@
           <p:nvPr/>
         </p:nvPicPr>
         <p:blipFill>
-          <a:blip r:embed="rId3"/>
+          <a:blip r:embed="rId2"/>
           <a:stretch>
             <a:fillRect/>
           </a:stretch>
@@ -15123,6 +14273,804 @@
           </a:p>
         </p:txBody>
       </p:sp>
+      <mc:AlternateContent xmlns:mc="http://schemas.openxmlformats.org/markup-compatibility/2006">
+        <mc:Choice xmlns:a14="http://schemas.microsoft.com/office/drawing/2010/main" Requires="a14">
+          <p:sp>
+            <p:nvSpPr>
+              <p:cNvPr id="7" name="TextBox 6">
+                <a:extLst>
+                  <a:ext uri="{FF2B5EF4-FFF2-40B4-BE49-F238E27FC236}">
+                    <a16:creationId xmlns:a16="http://schemas.microsoft.com/office/drawing/2014/main" id="{8FDCC5E6-B17D-307F-BBBE-8A8A73A0E578}"/>
+                  </a:ext>
+                </a:extLst>
+              </p:cNvPr>
+              <p:cNvSpPr txBox="1"/>
+              <p:nvPr/>
+            </p:nvSpPr>
+            <p:spPr>
+              <a:xfrm>
+                <a:off x="219456" y="1157699"/>
+                <a:ext cx="11704320" cy="5632311"/>
+              </a:xfrm>
+              <a:prstGeom prst="rect">
+                <a:avLst/>
+              </a:prstGeom>
+              <a:noFill/>
+            </p:spPr>
+            <p:txBody>
+              <a:bodyPr wrap="square">
+                <a:spAutoFit/>
+              </a:bodyPr>
+              <a:lstStyle/>
+              <a:p>
+                <a:pPr marL="0" indent="0">
+                  <a:buNone/>
+                </a:pPr>
+                <a:r>
+                  <a:rPr lang="en-US" sz="2400" dirty="0">
+                    <a:solidFill>
+                      <a:schemeClr val="accent6">
+                        <a:lumMod val="60000"/>
+                        <a:lumOff val="40000"/>
+                      </a:schemeClr>
+                    </a:solidFill>
+                  </a:rPr>
+                  <a:t>The </a:t>
+                </a:r>
+                <a:r>
+                  <a:rPr lang="en-US" sz="2400" b="1" dirty="0">
+                    <a:solidFill>
+                      <a:schemeClr val="accent6">
+                        <a:lumMod val="60000"/>
+                        <a:lumOff val="40000"/>
+                      </a:schemeClr>
+                    </a:solidFill>
+                  </a:rPr>
+                  <a:t>multiplication rule</a:t>
+                </a:r>
+                <a:r>
+                  <a:rPr lang="en-US" sz="2400" dirty="0">
+                    <a:solidFill>
+                      <a:schemeClr val="accent6">
+                        <a:lumMod val="60000"/>
+                        <a:lumOff val="40000"/>
+                      </a:schemeClr>
+                    </a:solidFill>
+                  </a:rPr>
+                  <a:t> is used to find the probability that </a:t>
+                </a:r>
+                <a:r>
+                  <a:rPr lang="en-US" sz="2400" b="1" dirty="0">
+                    <a:solidFill>
+                      <a:schemeClr val="accent6">
+                        <a:lumMod val="60000"/>
+                        <a:lumOff val="40000"/>
+                      </a:schemeClr>
+                    </a:solidFill>
+                  </a:rPr>
+                  <a:t>two (or more) events happen together</a:t>
+                </a:r>
+                <a:r>
+                  <a:rPr lang="en-US" sz="2400" dirty="0">
+                    <a:solidFill>
+                      <a:schemeClr val="accent6">
+                        <a:lumMod val="60000"/>
+                        <a:lumOff val="40000"/>
+                      </a:schemeClr>
+                    </a:solidFill>
+                  </a:rPr>
+                  <a:t> — that is, the intersection of events.</a:t>
+                </a:r>
+              </a:p>
+              <a:p>
+                <a:pPr marL="0" indent="0">
+                  <a:buNone/>
+                </a:pPr>
+                <a:r>
+                  <a:rPr lang="en-US" sz="2400" dirty="0">
+                    <a:solidFill>
+                      <a:schemeClr val="accent6">
+                        <a:lumMod val="60000"/>
+                        <a:lumOff val="40000"/>
+                      </a:schemeClr>
+                    </a:solidFill>
+                  </a:rPr>
+                  <a:t>Mathematically, for </a:t>
+                </a:r>
+                <a:r>
+                  <a:rPr lang="en-US" sz="2400" b="1" dirty="0">
+                    <a:solidFill>
+                      <a:schemeClr val="accent6">
+                        <a:lumMod val="60000"/>
+                        <a:lumOff val="40000"/>
+                      </a:schemeClr>
+                    </a:solidFill>
+                  </a:rPr>
+                  <a:t>two events A and B</a:t>
+                </a:r>
+                <a:r>
+                  <a:rPr lang="en-US" sz="2400" dirty="0">
+                    <a:solidFill>
+                      <a:schemeClr val="accent6">
+                        <a:lumMod val="60000"/>
+                        <a:lumOff val="40000"/>
+                      </a:schemeClr>
+                    </a:solidFill>
+                  </a:rPr>
+                  <a:t>:</a:t>
+                </a:r>
+              </a:p>
+              <a:p>
+                <a:pPr marL="0" indent="0" algn="ctr">
+                  <a:buNone/>
+                </a:pPr>
+                <a:r>
+                  <a:rPr lang="en-US" sz="2400" b="1" dirty="0">
+                    <a:solidFill>
+                      <a:schemeClr val="accent6">
+                        <a:lumMod val="60000"/>
+                        <a:lumOff val="40000"/>
+                      </a:schemeClr>
+                    </a:solidFill>
+                  </a:rPr>
+                  <a:t>P(A∩B) = P(A) × P(B|A)</a:t>
+                </a:r>
+              </a:p>
+              <a:p>
+                <a:pPr marL="0" indent="0">
+                  <a:buNone/>
+                </a:pPr>
+                <a:endParaRPr lang="en-US" sz="2400" b="1" dirty="0">
+                  <a:solidFill>
+                    <a:schemeClr val="accent6">
+                      <a:lumMod val="60000"/>
+                      <a:lumOff val="40000"/>
+                    </a:schemeClr>
+                  </a:solidFill>
+                </a:endParaRPr>
+              </a:p>
+              <a:p>
+                <a:r>
+                  <a:rPr lang="en-US" sz="2400" dirty="0">
+                    <a:solidFill>
+                      <a:schemeClr val="accent6">
+                        <a:lumMod val="60000"/>
+                        <a:lumOff val="40000"/>
+                      </a:schemeClr>
+                    </a:solidFill>
+                  </a:rPr>
+                  <a:t>P(A∩B):  Probability that both A </a:t>
+                </a:r>
+                <a:r>
+                  <a:rPr lang="en-US" sz="2400" b="1" u="sng" dirty="0">
+                    <a:solidFill>
+                      <a:schemeClr val="accent6">
+                        <a:lumMod val="60000"/>
+                        <a:lumOff val="40000"/>
+                      </a:schemeClr>
+                    </a:solidFill>
+                  </a:rPr>
+                  <a:t>and</a:t>
+                </a:r>
+                <a:r>
+                  <a:rPr lang="en-US" sz="2400" dirty="0">
+                    <a:solidFill>
+                      <a:schemeClr val="accent6">
+                        <a:lumMod val="60000"/>
+                        <a:lumOff val="40000"/>
+                      </a:schemeClr>
+                    </a:solidFill>
+                  </a:rPr>
+                  <a:t> B occur.</a:t>
+                </a:r>
+              </a:p>
+              <a:p>
+                <a:pPr marL="0" indent="0">
+                  <a:buNone/>
+                </a:pPr>
+                <a:r>
+                  <a:rPr lang="en-US" sz="2400" dirty="0">
+                    <a:solidFill>
+                      <a:schemeClr val="accent6">
+                        <a:lumMod val="60000"/>
+                        <a:lumOff val="40000"/>
+                      </a:schemeClr>
+                    </a:solidFill>
+                  </a:rPr>
+                  <a:t>P(A)      : Probability that event A occurs.</a:t>
+                </a:r>
+              </a:p>
+              <a:p>
+                <a:pPr marL="0" indent="0">
+                  <a:buNone/>
+                </a:pPr>
+                <a:r>
+                  <a:rPr lang="en-US" sz="2400" dirty="0">
+                    <a:solidFill>
+                      <a:schemeClr val="accent6">
+                        <a:lumMod val="60000"/>
+                        <a:lumOff val="40000"/>
+                      </a:schemeClr>
+                    </a:solidFill>
+                  </a:rPr>
+                  <a:t>P(B|A)  : Probability that event B occurs given that A has already occurred.</a:t>
+                </a:r>
+              </a:p>
+              <a:p>
+                <a:pPr marL="0" indent="0">
+                  <a:buNone/>
+                </a:pPr>
+                <a:endParaRPr lang="en-US" sz="2400" dirty="0">
+                  <a:solidFill>
+                    <a:schemeClr val="accent6">
+                      <a:lumMod val="60000"/>
+                      <a:lumOff val="40000"/>
+                    </a:schemeClr>
+                  </a:solidFill>
+                </a:endParaRPr>
+              </a:p>
+              <a:p>
+                <a:pPr marL="0" indent="0">
+                  <a:buNone/>
+                </a:pPr>
+                <a:r>
+                  <a:rPr lang="en-US" sz="2400" dirty="0">
+                    <a:solidFill>
+                      <a:schemeClr val="accent6">
+                        <a:lumMod val="60000"/>
+                        <a:lumOff val="40000"/>
+                      </a:schemeClr>
+                    </a:solidFill>
+                  </a:rPr>
+                  <a:t>Special Case: If A and B are independent, then P(B|A) = P(B). In this case,</a:t>
+                </a:r>
+              </a:p>
+              <a:p>
+                <a:pPr/>
+                <a14:m>
+                  <m:oMathPara xmlns:m="http://schemas.openxmlformats.org/officeDocument/2006/math">
+                    <m:oMathParaPr>
+                      <m:jc m:val="centerGroup"/>
+                    </m:oMathParaPr>
+                    <m:oMath xmlns:m="http://schemas.openxmlformats.org/officeDocument/2006/math">
+                      <m:r>
+                        <a:rPr lang="en-US" sz="2400" i="1">
+                          <a:solidFill>
+                            <a:schemeClr val="accent6">
+                              <a:lumMod val="60000"/>
+                              <a:lumOff val="40000"/>
+                            </a:schemeClr>
+                          </a:solidFill>
+                          <a:latin typeface="Cambria Math" panose="02040503050406030204" pitchFamily="18" charset="0"/>
+                        </a:rPr>
+                        <m:t>𝑃</m:t>
+                      </m:r>
+                      <m:d>
+                        <m:dPr>
+                          <m:ctrlPr>
+                            <a:rPr lang="ar-AE" sz="2400" i="1">
+                              <a:solidFill>
+                                <a:schemeClr val="accent6">
+                                  <a:lumMod val="60000"/>
+                                  <a:lumOff val="40000"/>
+                                </a:schemeClr>
+                              </a:solidFill>
+                              <a:latin typeface="Cambria Math" panose="02040503050406030204" pitchFamily="18" charset="0"/>
+                            </a:rPr>
+                          </m:ctrlPr>
+                        </m:dPr>
+                        <m:e>
+                          <m:r>
+                            <a:rPr lang="ar-AE" sz="2400" i="1">
+                              <a:solidFill>
+                                <a:schemeClr val="accent6">
+                                  <a:lumMod val="60000"/>
+                                  <a:lumOff val="40000"/>
+                                </a:schemeClr>
+                              </a:solidFill>
+                              <a:latin typeface="Cambria Math" panose="02040503050406030204" pitchFamily="18" charset="0"/>
+                            </a:rPr>
+                            <m:t>𝐴</m:t>
+                          </m:r>
+                          <m:r>
+                            <a:rPr lang="ar-AE" sz="2400">
+                              <a:solidFill>
+                                <a:schemeClr val="accent6">
+                                  <a:lumMod val="60000"/>
+                                  <a:lumOff val="40000"/>
+                                </a:schemeClr>
+                              </a:solidFill>
+                              <a:latin typeface="Cambria Math" panose="02040503050406030204" pitchFamily="18" charset="0"/>
+                            </a:rPr>
+                            <m:t>∩</m:t>
+                          </m:r>
+                          <m:r>
+                            <a:rPr lang="ar-AE" sz="2400" i="1">
+                              <a:solidFill>
+                                <a:schemeClr val="accent6">
+                                  <a:lumMod val="60000"/>
+                                  <a:lumOff val="40000"/>
+                                </a:schemeClr>
+                              </a:solidFill>
+                              <a:latin typeface="Cambria Math" panose="02040503050406030204" pitchFamily="18" charset="0"/>
+                            </a:rPr>
+                            <m:t>𝐵</m:t>
+                          </m:r>
+                        </m:e>
+                      </m:d>
+                      <m:r>
+                        <a:rPr lang="ar-AE" sz="2400">
+                          <a:solidFill>
+                            <a:schemeClr val="accent6">
+                              <a:lumMod val="60000"/>
+                              <a:lumOff val="40000"/>
+                            </a:schemeClr>
+                          </a:solidFill>
+                          <a:latin typeface="Cambria Math" panose="02040503050406030204" pitchFamily="18" charset="0"/>
+                        </a:rPr>
+                        <m:t>=</m:t>
+                      </m:r>
+                      <m:r>
+                        <a:rPr lang="ar-AE" sz="2400" i="1">
+                          <a:solidFill>
+                            <a:schemeClr val="accent6">
+                              <a:lumMod val="60000"/>
+                              <a:lumOff val="40000"/>
+                            </a:schemeClr>
+                          </a:solidFill>
+                          <a:latin typeface="Cambria Math" panose="02040503050406030204" pitchFamily="18" charset="0"/>
+                        </a:rPr>
+                        <m:t>𝑃</m:t>
+                      </m:r>
+                      <m:d>
+                        <m:dPr>
+                          <m:ctrlPr>
+                            <a:rPr lang="ar-AE" sz="2400" i="1">
+                              <a:solidFill>
+                                <a:schemeClr val="accent6">
+                                  <a:lumMod val="60000"/>
+                                  <a:lumOff val="40000"/>
+                                </a:schemeClr>
+                              </a:solidFill>
+                              <a:latin typeface="Cambria Math" panose="02040503050406030204" pitchFamily="18" charset="0"/>
+                            </a:rPr>
+                          </m:ctrlPr>
+                        </m:dPr>
+                        <m:e>
+                          <m:r>
+                            <a:rPr lang="ar-AE" sz="2400" i="1">
+                              <a:solidFill>
+                                <a:schemeClr val="accent6">
+                                  <a:lumMod val="60000"/>
+                                  <a:lumOff val="40000"/>
+                                </a:schemeClr>
+                              </a:solidFill>
+                              <a:latin typeface="Cambria Math" panose="02040503050406030204" pitchFamily="18" charset="0"/>
+                            </a:rPr>
+                            <m:t>𝐴</m:t>
+                          </m:r>
+                        </m:e>
+                      </m:d>
+                      <m:r>
+                        <a:rPr lang="ar-AE" sz="2400">
+                          <a:solidFill>
+                            <a:schemeClr val="accent6">
+                              <a:lumMod val="60000"/>
+                              <a:lumOff val="40000"/>
+                            </a:schemeClr>
+                          </a:solidFill>
+                          <a:latin typeface="Cambria Math" panose="02040503050406030204" pitchFamily="18" charset="0"/>
+                        </a:rPr>
+                        <m:t>×</m:t>
+                      </m:r>
+                      <m:r>
+                        <a:rPr lang="ar-AE" sz="2400" i="1">
+                          <a:solidFill>
+                            <a:schemeClr val="accent6">
+                              <a:lumMod val="60000"/>
+                              <a:lumOff val="40000"/>
+                            </a:schemeClr>
+                          </a:solidFill>
+                          <a:latin typeface="Cambria Math" panose="02040503050406030204" pitchFamily="18" charset="0"/>
+                        </a:rPr>
+                        <m:t>𝑃</m:t>
+                      </m:r>
+                      <m:d>
+                        <m:dPr>
+                          <m:ctrlPr>
+                            <a:rPr lang="ar-AE" sz="2400" i="1">
+                              <a:solidFill>
+                                <a:schemeClr val="accent6">
+                                  <a:lumMod val="60000"/>
+                                  <a:lumOff val="40000"/>
+                                </a:schemeClr>
+                              </a:solidFill>
+                              <a:latin typeface="Cambria Math" panose="02040503050406030204" pitchFamily="18" charset="0"/>
+                            </a:rPr>
+                          </m:ctrlPr>
+                        </m:dPr>
+                        <m:e>
+                          <m:r>
+                            <a:rPr lang="ar-AE" sz="2400" i="1">
+                              <a:solidFill>
+                                <a:schemeClr val="accent6">
+                                  <a:lumMod val="60000"/>
+                                  <a:lumOff val="40000"/>
+                                </a:schemeClr>
+                              </a:solidFill>
+                              <a:latin typeface="Cambria Math" panose="02040503050406030204" pitchFamily="18" charset="0"/>
+                            </a:rPr>
+                            <m:t>𝐵</m:t>
+                          </m:r>
+                        </m:e>
+                      </m:d>
+                    </m:oMath>
+                  </m:oMathPara>
+                </a14:m>
+                <a:endParaRPr lang="ar-AE" sz="2400" dirty="0">
+                  <a:solidFill>
+                    <a:schemeClr val="accent6">
+                      <a:lumMod val="60000"/>
+                      <a:lumOff val="40000"/>
+                    </a:schemeClr>
+                  </a:solidFill>
+                </a:endParaRPr>
+              </a:p>
+              <a:p>
+                <a:endParaRPr lang="en-US" sz="2400" dirty="0">
+                  <a:solidFill>
+                    <a:schemeClr val="accent6">
+                      <a:lumMod val="60000"/>
+                      <a:lumOff val="40000"/>
+                    </a:schemeClr>
+                  </a:solidFill>
+                </a:endParaRPr>
+              </a:p>
+              <a:p>
+                <a:r>
+                  <a:rPr lang="en-US" sz="2400" dirty="0">
+                    <a:solidFill>
+                      <a:schemeClr val="accent6">
+                        <a:lumMod val="60000"/>
+                        <a:lumOff val="40000"/>
+                      </a:schemeClr>
+                    </a:solidFill>
+                  </a:rPr>
+                  <a:t>We can use above equation to define independence of two events:</a:t>
+                </a:r>
+              </a:p>
+              <a:p>
+                <a:pPr marL="285750" indent="-285750">
+                  <a:buFont typeface="Arial" panose="020B0604020202020204" pitchFamily="34" charset="0"/>
+                  <a:buChar char="•"/>
+                </a:pPr>
+                <a:r>
+                  <a:rPr lang="en-US" sz="2400" dirty="0">
+                    <a:solidFill>
+                      <a:schemeClr val="accent6">
+                        <a:lumMod val="60000"/>
+                        <a:lumOff val="40000"/>
+                      </a:schemeClr>
+                    </a:solidFill>
+                  </a:rPr>
+                  <a:t>Two events </a:t>
+                </a:r>
+                <a14:m>
+                  <m:oMath xmlns:m="http://schemas.openxmlformats.org/officeDocument/2006/math">
+                    <m:r>
+                      <a:rPr lang="en-US" sz="2400" i="1">
+                        <a:solidFill>
+                          <a:schemeClr val="accent6">
+                            <a:lumMod val="60000"/>
+                            <a:lumOff val="40000"/>
+                          </a:schemeClr>
+                        </a:solidFill>
+                        <a:latin typeface="Cambria Math" panose="02040503050406030204" pitchFamily="18" charset="0"/>
+                      </a:rPr>
+                      <m:t>𝐴</m:t>
+                    </m:r>
+                  </m:oMath>
+                </a14:m>
+                <a:r>
+                  <a:rPr lang="en-US" sz="2400" dirty="0">
+                    <a:solidFill>
+                      <a:schemeClr val="accent6">
+                        <a:lumMod val="60000"/>
+                        <a:lumOff val="40000"/>
+                      </a:schemeClr>
+                    </a:solidFill>
+                  </a:rPr>
+                  <a:t> and </a:t>
+                </a:r>
+                <a14:m>
+                  <m:oMath xmlns:m="http://schemas.openxmlformats.org/officeDocument/2006/math">
+                    <m:r>
+                      <a:rPr lang="en-US" sz="2400" i="1">
+                        <a:solidFill>
+                          <a:schemeClr val="accent6">
+                            <a:lumMod val="60000"/>
+                            <a:lumOff val="40000"/>
+                          </a:schemeClr>
+                        </a:solidFill>
+                        <a:latin typeface="Cambria Math" panose="02040503050406030204" pitchFamily="18" charset="0"/>
+                      </a:rPr>
+                      <m:t>𝐵</m:t>
+                    </m:r>
+                  </m:oMath>
+                </a14:m>
+                <a:r>
+                  <a:rPr lang="en-US" sz="2400" dirty="0">
+                    <a:solidFill>
+                      <a:schemeClr val="accent6">
+                        <a:lumMod val="60000"/>
+                        <a:lumOff val="40000"/>
+                      </a:schemeClr>
+                    </a:solidFill>
+                  </a:rPr>
+                  <a:t>are </a:t>
+                </a:r>
+                <a:r>
+                  <a:rPr lang="en-US" sz="2400" b="1" dirty="0">
+                    <a:solidFill>
+                      <a:schemeClr val="accent6">
+                        <a:lumMod val="60000"/>
+                        <a:lumOff val="40000"/>
+                      </a:schemeClr>
+                    </a:solidFill>
+                  </a:rPr>
+                  <a:t>independent</a:t>
+                </a:r>
+                <a:r>
+                  <a:rPr lang="en-US" sz="2400" dirty="0">
+                    <a:solidFill>
+                      <a:schemeClr val="accent6">
+                        <a:lumMod val="60000"/>
+                        <a:lumOff val="40000"/>
+                      </a:schemeClr>
+                    </a:solidFill>
+                  </a:rPr>
+                  <a:t> if and only if</a:t>
+                </a:r>
+              </a:p>
+              <a:p>
+                <a:pPr/>
+                <a14:m>
+                  <m:oMathPara xmlns:m="http://schemas.openxmlformats.org/officeDocument/2006/math">
+                    <m:oMathParaPr>
+                      <m:jc m:val="centerGroup"/>
+                    </m:oMathParaPr>
+                    <m:oMath xmlns:m="http://schemas.openxmlformats.org/officeDocument/2006/math">
+                      <m:r>
+                        <a:rPr lang="en-US" sz="2400" i="1">
+                          <a:solidFill>
+                            <a:schemeClr val="accent6">
+                              <a:lumMod val="60000"/>
+                              <a:lumOff val="40000"/>
+                            </a:schemeClr>
+                          </a:solidFill>
+                          <a:latin typeface="Cambria Math" panose="02040503050406030204" pitchFamily="18" charset="0"/>
+                        </a:rPr>
+                        <m:t>𝑃</m:t>
+                      </m:r>
+                      <m:d>
+                        <m:dPr>
+                          <m:ctrlPr>
+                            <a:rPr lang="ar-AE" sz="2400" i="1">
+                              <a:solidFill>
+                                <a:schemeClr val="accent6">
+                                  <a:lumMod val="60000"/>
+                                  <a:lumOff val="40000"/>
+                                </a:schemeClr>
+                              </a:solidFill>
+                              <a:latin typeface="Cambria Math" panose="02040503050406030204" pitchFamily="18" charset="0"/>
+                            </a:rPr>
+                          </m:ctrlPr>
+                        </m:dPr>
+                        <m:e>
+                          <m:r>
+                            <a:rPr lang="ar-AE" sz="2400" i="1">
+                              <a:solidFill>
+                                <a:schemeClr val="accent6">
+                                  <a:lumMod val="60000"/>
+                                  <a:lumOff val="40000"/>
+                                </a:schemeClr>
+                              </a:solidFill>
+                              <a:latin typeface="Cambria Math" panose="02040503050406030204" pitchFamily="18" charset="0"/>
+                            </a:rPr>
+                            <m:t>𝐴</m:t>
+                          </m:r>
+                          <m:r>
+                            <a:rPr lang="ar-AE" sz="2400">
+                              <a:solidFill>
+                                <a:schemeClr val="accent6">
+                                  <a:lumMod val="60000"/>
+                                  <a:lumOff val="40000"/>
+                                </a:schemeClr>
+                              </a:solidFill>
+                              <a:latin typeface="Cambria Math" panose="02040503050406030204" pitchFamily="18" charset="0"/>
+                            </a:rPr>
+                            <m:t>∩</m:t>
+                          </m:r>
+                          <m:r>
+                            <a:rPr lang="ar-AE" sz="2400" i="1">
+                              <a:solidFill>
+                                <a:schemeClr val="accent6">
+                                  <a:lumMod val="60000"/>
+                                  <a:lumOff val="40000"/>
+                                </a:schemeClr>
+                              </a:solidFill>
+                              <a:latin typeface="Cambria Math" panose="02040503050406030204" pitchFamily="18" charset="0"/>
+                            </a:rPr>
+                            <m:t>𝐵</m:t>
+                          </m:r>
+                        </m:e>
+                      </m:d>
+                      <m:r>
+                        <a:rPr lang="ar-AE" sz="2400">
+                          <a:solidFill>
+                            <a:schemeClr val="accent6">
+                              <a:lumMod val="60000"/>
+                              <a:lumOff val="40000"/>
+                            </a:schemeClr>
+                          </a:solidFill>
+                          <a:latin typeface="Cambria Math" panose="02040503050406030204" pitchFamily="18" charset="0"/>
+                        </a:rPr>
+                        <m:t>=</m:t>
+                      </m:r>
+                      <m:r>
+                        <a:rPr lang="ar-AE" sz="2400" i="1">
+                          <a:solidFill>
+                            <a:schemeClr val="accent6">
+                              <a:lumMod val="60000"/>
+                              <a:lumOff val="40000"/>
+                            </a:schemeClr>
+                          </a:solidFill>
+                          <a:latin typeface="Cambria Math" panose="02040503050406030204" pitchFamily="18" charset="0"/>
+                        </a:rPr>
+                        <m:t>𝑃</m:t>
+                      </m:r>
+                      <m:d>
+                        <m:dPr>
+                          <m:ctrlPr>
+                            <a:rPr lang="ar-AE" sz="2400" i="1">
+                              <a:solidFill>
+                                <a:schemeClr val="accent6">
+                                  <a:lumMod val="60000"/>
+                                  <a:lumOff val="40000"/>
+                                </a:schemeClr>
+                              </a:solidFill>
+                              <a:latin typeface="Cambria Math" panose="02040503050406030204" pitchFamily="18" charset="0"/>
+                            </a:rPr>
+                          </m:ctrlPr>
+                        </m:dPr>
+                        <m:e>
+                          <m:r>
+                            <a:rPr lang="ar-AE" sz="2400" i="1">
+                              <a:solidFill>
+                                <a:schemeClr val="accent6">
+                                  <a:lumMod val="60000"/>
+                                  <a:lumOff val="40000"/>
+                                </a:schemeClr>
+                              </a:solidFill>
+                              <a:latin typeface="Cambria Math" panose="02040503050406030204" pitchFamily="18" charset="0"/>
+                            </a:rPr>
+                            <m:t>𝐴</m:t>
+                          </m:r>
+                        </m:e>
+                      </m:d>
+                      <m:r>
+                        <a:rPr lang="ar-AE" sz="2400">
+                          <a:solidFill>
+                            <a:schemeClr val="accent6">
+                              <a:lumMod val="60000"/>
+                              <a:lumOff val="40000"/>
+                            </a:schemeClr>
+                          </a:solidFill>
+                          <a:latin typeface="Cambria Math" panose="02040503050406030204" pitchFamily="18" charset="0"/>
+                        </a:rPr>
+                        <m:t>×</m:t>
+                      </m:r>
+                      <m:r>
+                        <a:rPr lang="ar-AE" sz="2400" i="1">
+                          <a:solidFill>
+                            <a:schemeClr val="accent6">
+                              <a:lumMod val="60000"/>
+                              <a:lumOff val="40000"/>
+                            </a:schemeClr>
+                          </a:solidFill>
+                          <a:latin typeface="Cambria Math" panose="02040503050406030204" pitchFamily="18" charset="0"/>
+                        </a:rPr>
+                        <m:t>𝑃</m:t>
+                      </m:r>
+                      <m:d>
+                        <m:dPr>
+                          <m:ctrlPr>
+                            <a:rPr lang="ar-AE" sz="2400" i="1">
+                              <a:solidFill>
+                                <a:schemeClr val="accent6">
+                                  <a:lumMod val="60000"/>
+                                  <a:lumOff val="40000"/>
+                                </a:schemeClr>
+                              </a:solidFill>
+                              <a:latin typeface="Cambria Math" panose="02040503050406030204" pitchFamily="18" charset="0"/>
+                            </a:rPr>
+                          </m:ctrlPr>
+                        </m:dPr>
+                        <m:e>
+                          <m:r>
+                            <a:rPr lang="ar-AE" sz="2400" i="1">
+                              <a:solidFill>
+                                <a:schemeClr val="accent6">
+                                  <a:lumMod val="60000"/>
+                                  <a:lumOff val="40000"/>
+                                </a:schemeClr>
+                              </a:solidFill>
+                              <a:latin typeface="Cambria Math" panose="02040503050406030204" pitchFamily="18" charset="0"/>
+                            </a:rPr>
+                            <m:t>𝐵</m:t>
+                          </m:r>
+                        </m:e>
+                      </m:d>
+                    </m:oMath>
+                  </m:oMathPara>
+                </a14:m>
+                <a:endParaRPr lang="ar-AE" sz="2400" dirty="0">
+                  <a:solidFill>
+                    <a:schemeClr val="accent6">
+                      <a:lumMod val="60000"/>
+                      <a:lumOff val="40000"/>
+                    </a:schemeClr>
+                  </a:solidFill>
+                </a:endParaRPr>
+              </a:p>
+            </p:txBody>
+          </p:sp>
+        </mc:Choice>
+        <mc:Fallback>
+          <p:sp>
+            <p:nvSpPr>
+              <p:cNvPr id="7" name="TextBox 6">
+                <a:extLst>
+                  <a:ext uri="{FF2B5EF4-FFF2-40B4-BE49-F238E27FC236}">
+                    <a16:creationId xmlns:a16="http://schemas.microsoft.com/office/drawing/2014/main" id="{8FDCC5E6-B17D-307F-BBBE-8A8A73A0E578}"/>
+                  </a:ext>
+                </a:extLst>
+              </p:cNvPr>
+              <p:cNvSpPr txBox="1">
+                <a:spLocks noRot="1" noChangeAspect="1" noMove="1" noResize="1" noEditPoints="1" noAdjustHandles="1" noChangeArrowheads="1" noChangeShapeType="1" noTextEdit="1"/>
+              </p:cNvSpPr>
+              <p:nvPr/>
+            </p:nvSpPr>
+            <p:spPr>
+              <a:xfrm>
+                <a:off x="219456" y="1157699"/>
+                <a:ext cx="11704320" cy="5632311"/>
+              </a:xfrm>
+              <a:prstGeom prst="rect">
+                <a:avLst/>
+              </a:prstGeom>
+              <a:blipFill>
+                <a:blip r:embed="rId3"/>
+                <a:stretch>
+                  <a:fillRect l="-781" t="-866"/>
+                </a:stretch>
+              </a:blipFill>
+            </p:spPr>
+            <p:txBody>
+              <a:bodyPr/>
+              <a:lstStyle/>
+              <a:p>
+                <a:r>
+                  <a:rPr lang="en-US">
+                    <a:noFill/>
+                  </a:rPr>
+                  <a:t> </a:t>
+                </a:r>
+              </a:p>
+            </p:txBody>
+          </p:sp>
+        </mc:Fallback>
+      </mc:AlternateContent>
     </p:spTree>
     <p:extLst>
       <p:ext uri="{BB962C8B-B14F-4D97-AF65-F5344CB8AC3E}">
@@ -15211,7 +15159,7 @@
         <p:spPr>
           <a:xfrm>
             <a:off x="219456" y="874235"/>
-            <a:ext cx="11704320" cy="923330"/>
+            <a:ext cx="11704320" cy="1569660"/>
           </a:xfrm>
           <a:prstGeom prst="rect">
             <a:avLst/>
@@ -15225,7 +15173,7 @@
           <a:lstStyle/>
           <a:p>
             <a:r>
-              <a:rPr lang="en-US" b="1" dirty="0">
+              <a:rPr lang="en-US" sz="2400" b="1" dirty="0">
                 <a:solidFill>
                   <a:schemeClr val="accent6">
                     <a:lumMod val="60000"/>
@@ -15236,7 +15184,7 @@
               <a:t>Problem</a:t>
             </a:r>
             <a:r>
-              <a:rPr lang="en-US" dirty="0">
+              <a:rPr lang="en-US" sz="2400" dirty="0">
                 <a:solidFill>
                   <a:schemeClr val="accent6">
                     <a:lumMod val="60000"/>
@@ -15246,8 +15194,10 @@
               </a:rPr>
               <a:t>: A box contains 5 balls — 3 red and 2 blue.</a:t>
             </a:r>
+          </a:p>
+          <a:p>
             <a:br>
-              <a:rPr lang="en-US" dirty="0">
+              <a:rPr lang="en-US" sz="2400" dirty="0">
                 <a:solidFill>
                   <a:schemeClr val="accent6">
                     <a:lumMod val="60000"/>
@@ -15257,7 +15207,7 @@
               </a:rPr>
             </a:br>
             <a:r>
-              <a:rPr lang="en-US" dirty="0">
+              <a:rPr lang="en-US" sz="2400" dirty="0">
                 <a:solidFill>
                   <a:schemeClr val="accent6">
                     <a:lumMod val="60000"/>
@@ -15268,7 +15218,7 @@
               <a:t>Two balls are drawn one after another </a:t>
             </a:r>
             <a:r>
-              <a:rPr lang="en-US" b="1" dirty="0">
+              <a:rPr lang="en-US" sz="2400" b="1" dirty="0">
                 <a:solidFill>
                   <a:schemeClr val="accent6">
                     <a:lumMod val="60000"/>
@@ -15279,7 +15229,7 @@
               <a:t>without replacement</a:t>
             </a:r>
             <a:r>
-              <a:rPr lang="en-US" dirty="0">
+              <a:rPr lang="en-US" sz="2400" dirty="0">
                 <a:solidFill>
                   <a:schemeClr val="accent6">
                     <a:lumMod val="60000"/>
@@ -15287,18 +15237,21 @@
                   </a:schemeClr>
                 </a:solidFill>
               </a:rPr>
-              <a:t>. What is the probability that both balls are red ?</a:t>
+              <a:t>. </a:t>
             </a:r>
           </a:p>
           <a:p>
-            <a:endParaRPr lang="en-US" dirty="0">
-              <a:solidFill>
-                <a:schemeClr val="accent6">
-                  <a:lumMod val="60000"/>
-                  <a:lumOff val="40000"/>
-                </a:schemeClr>
-              </a:solidFill>
-            </a:endParaRPr>
+            <a:r>
+              <a:rPr lang="en-US" sz="2400" dirty="0">
+                <a:solidFill>
+                  <a:schemeClr val="accent6">
+                    <a:lumMod val="60000"/>
+                    <a:lumOff val="40000"/>
+                  </a:schemeClr>
+                </a:solidFill>
+              </a:rPr>
+              <a:t>What is the probability that both balls are red ?</a:t>
+            </a:r>
           </a:p>
         </p:txBody>
       </p:sp>
@@ -15450,8 +15403,8 @@
           </a:p>
         </p:txBody>
       </p:sp>
-      <mc:AlternateContent xmlns:mc="http://schemas.openxmlformats.org/markup-compatibility/2006">
-        <mc:Choice xmlns:a14="http://schemas.microsoft.com/office/drawing/2010/main" Requires="a14">
+      <mc:AlternateContent xmlns:mc="http://schemas.openxmlformats.org/markup-compatibility/2006" xmlns:a14="http://schemas.microsoft.com/office/drawing/2010/main">
+        <mc:Choice Requires="a14">
           <p:sp>
             <p:nvSpPr>
               <p:cNvPr id="7" name="TextBox 6">
@@ -16647,7 +16600,7 @@
             </p:txBody>
           </p:sp>
         </mc:Choice>
-        <mc:Fallback>
+        <mc:Fallback xmlns="">
           <p:sp>
             <p:nvSpPr>
               <p:cNvPr id="7" name="TextBox 6">
@@ -17136,8 +17089,8 @@
           </a:p>
         </p:txBody>
       </p:sp>
-      <mc:AlternateContent xmlns:mc="http://schemas.openxmlformats.org/markup-compatibility/2006">
-        <mc:Choice xmlns:a14="http://schemas.microsoft.com/office/drawing/2010/main" Requires="a14">
+      <mc:AlternateContent xmlns:mc="http://schemas.openxmlformats.org/markup-compatibility/2006" xmlns:a14="http://schemas.microsoft.com/office/drawing/2010/main">
+        <mc:Choice Requires="a14">
           <p:sp>
             <p:nvSpPr>
               <p:cNvPr id="7" name="TextBox 6">
@@ -17839,7 +17792,6 @@
                 </a:endParaRPr>
               </a:p>
               <a:p>
-                <a:pPr/>
                 <a14:m>
                   <m:oMath xmlns:m="http://schemas.openxmlformats.org/officeDocument/2006/math">
                     <m:r>
@@ -18215,7 +18167,7 @@
             </p:txBody>
           </p:sp>
         </mc:Choice>
-        <mc:Fallback>
+        <mc:Fallback xmlns="">
           <p:sp>
             <p:nvSpPr>
               <p:cNvPr id="7" name="TextBox 6">
@@ -18570,8 +18522,8 @@
           </a:p>
         </p:txBody>
       </p:sp>
-      <mc:AlternateContent xmlns:mc="http://schemas.openxmlformats.org/markup-compatibility/2006">
-        <mc:Choice xmlns:a14="http://schemas.microsoft.com/office/drawing/2010/main" Requires="a14">
+      <mc:AlternateContent xmlns:mc="http://schemas.openxmlformats.org/markup-compatibility/2006" xmlns:a14="http://schemas.microsoft.com/office/drawing/2010/main">
+        <mc:Choice Requires="a14">
           <p:sp>
             <p:nvSpPr>
               <p:cNvPr id="7" name="TextBox 6">
@@ -18700,7 +18652,7 @@
             </p:txBody>
           </p:sp>
         </mc:Choice>
-        <mc:Fallback>
+        <mc:Fallback xmlns="">
           <p:sp>
             <p:nvSpPr>
               <p:cNvPr id="7" name="TextBox 6">
@@ -18893,8 +18845,8 @@
           </a:p>
         </p:txBody>
       </p:sp>
-      <mc:AlternateContent xmlns:mc="http://schemas.openxmlformats.org/markup-compatibility/2006">
-        <mc:Choice xmlns:a14="http://schemas.microsoft.com/office/drawing/2010/main" Requires="a14">
+      <mc:AlternateContent xmlns:mc="http://schemas.openxmlformats.org/markup-compatibility/2006" xmlns:a14="http://schemas.microsoft.com/office/drawing/2010/main">
+        <mc:Choice Requires="a14">
           <p:sp>
             <p:nvSpPr>
               <p:cNvPr id="7" name="TextBox 6">
@@ -19846,7 +19798,7 @@
             </p:txBody>
           </p:sp>
         </mc:Choice>
-        <mc:Fallback>
+        <mc:Fallback xmlns="">
           <p:sp>
             <p:nvSpPr>
               <p:cNvPr id="7" name="TextBox 6">
